--- a/slides/08-network-lab.pptx
+++ b/slides/08-network-lab.pptx
@@ -5,16 +5,17 @@
     <p:sldMasterId id="2147483660" r:id="rId1"/>
   </p:sldMasterIdLst>
   <p:notesMasterIdLst>
-    <p:notesMasterId r:id="rId9"/>
+    <p:notesMasterId r:id="rId10"/>
   </p:notesMasterIdLst>
   <p:sldIdLst>
     <p:sldId id="256" r:id="rId2"/>
-    <p:sldId id="257" r:id="rId3"/>
-    <p:sldId id="429" r:id="rId4"/>
-    <p:sldId id="430" r:id="rId5"/>
-    <p:sldId id="431" r:id="rId6"/>
-    <p:sldId id="432" r:id="rId7"/>
-    <p:sldId id="433" r:id="rId8"/>
+    <p:sldId id="434" r:id="rId3"/>
+    <p:sldId id="257" r:id="rId4"/>
+    <p:sldId id="429" r:id="rId5"/>
+    <p:sldId id="430" r:id="rId6"/>
+    <p:sldId id="431" r:id="rId7"/>
+    <p:sldId id="432" r:id="rId8"/>
+    <p:sldId id="433" r:id="rId9"/>
   </p:sldIdLst>
   <p:sldSz cx="12192000" cy="6858000"/>
   <p:notesSz cx="6858000" cy="9144000"/>
@@ -203,7 +204,7 @@
           <a:p>
             <a:fld id="{2CD22518-F7FE-2E40-9C60-793856882CE6}" type="datetimeFigureOut">
               <a:rPr lang="en-US" smtClean="0"/>
-              <a:t>2/3/26</a:t>
+              <a:t>2/24/26</a:t>
             </a:fld>
             <a:endParaRPr lang="en-US"/>
           </a:p>
@@ -535,7 +536,7 @@
           <a:p>
             <a:fld id="{362CD335-F0CB-D347-B8A5-7AB70F34C34F}" type="slidenum">
               <a:rPr lang="en-US" smtClean="0"/>
-              <a:t>4</a:t>
+              <a:t>5</a:t>
             </a:fld>
             <a:endParaRPr lang="en-US"/>
           </a:p>
@@ -643,7 +644,7 @@
           <a:p>
             <a:fld id="{362CD335-F0CB-D347-B8A5-7AB70F34C34F}" type="slidenum">
               <a:rPr lang="en-US" smtClean="0"/>
-              <a:t>5</a:t>
+              <a:t>6</a:t>
             </a:fld>
             <a:endParaRPr lang="en-US"/>
           </a:p>
@@ -751,7 +752,7 @@
           <a:p>
             <a:fld id="{362CD335-F0CB-D347-B8A5-7AB70F34C34F}" type="slidenum">
               <a:rPr lang="en-US" smtClean="0"/>
-              <a:t>6</a:t>
+              <a:t>7</a:t>
             </a:fld>
             <a:endParaRPr lang="en-US"/>
           </a:p>
@@ -859,7 +860,7 @@
           <a:p>
             <a:fld id="{362CD335-F0CB-D347-B8A5-7AB70F34C34F}" type="slidenum">
               <a:rPr lang="en-US" smtClean="0"/>
-              <a:t>7</a:t>
+              <a:t>8</a:t>
             </a:fld>
             <a:endParaRPr lang="en-US"/>
           </a:p>
@@ -1131,7 +1132,7 @@
             <a:fld id="{B61BEF0D-F0BB-DE4B-95CE-6DB70DBA9567}" type="datetimeFigureOut">
               <a:rPr lang="en-US" smtClean="0"/>
               <a:pPr/>
-              <a:t>2/3/26</a:t>
+              <a:t>2/24/26</a:t>
             </a:fld>
             <a:endParaRPr lang="en-US" dirty="0"/>
           </a:p>
@@ -1395,7 +1396,7 @@
             <a:fld id="{B61BEF0D-F0BB-DE4B-95CE-6DB70DBA9567}" type="datetimeFigureOut">
               <a:rPr lang="en-US" smtClean="0"/>
               <a:pPr/>
-              <a:t>2/3/26</a:t>
+              <a:t>2/24/26</a:t>
             </a:fld>
             <a:endParaRPr lang="en-US" dirty="0"/>
           </a:p>
@@ -1632,7 +1633,7 @@
             <a:fld id="{B61BEF0D-F0BB-DE4B-95CE-6DB70DBA9567}" type="datetimeFigureOut">
               <a:rPr lang="en-US" smtClean="0"/>
               <a:pPr/>
-              <a:t>2/3/26</a:t>
+              <a:t>2/24/26</a:t>
             </a:fld>
             <a:endParaRPr lang="en-US" dirty="0"/>
           </a:p>
@@ -1881,7 +1882,7 @@
             <a:fld id="{B61BEF0D-F0BB-DE4B-95CE-6DB70DBA9567}" type="datetimeFigureOut">
               <a:rPr lang="en-US" smtClean="0"/>
               <a:pPr/>
-              <a:t>2/3/26</a:t>
+              <a:t>2/24/26</a:t>
             </a:fld>
             <a:endParaRPr lang="en-US" dirty="0"/>
           </a:p>
@@ -2190,7 +2191,7 @@
             <a:fld id="{B61BEF0D-F0BB-DE4B-95CE-6DB70DBA9567}" type="datetimeFigureOut">
               <a:rPr lang="en-US" smtClean="0"/>
               <a:pPr/>
-              <a:t>2/3/26</a:t>
+              <a:t>2/24/26</a:t>
             </a:fld>
             <a:endParaRPr lang="en-US" dirty="0"/>
           </a:p>
@@ -2494,7 +2495,7 @@
             <a:fld id="{B61BEF0D-F0BB-DE4B-95CE-6DB70DBA9567}" type="datetimeFigureOut">
               <a:rPr lang="en-US" smtClean="0"/>
               <a:pPr/>
-              <a:t>2/3/26</a:t>
+              <a:t>2/24/26</a:t>
             </a:fld>
             <a:endParaRPr lang="en-US" dirty="0"/>
           </a:p>
@@ -2918,7 +2919,7 @@
             <a:fld id="{B61BEF0D-F0BB-DE4B-95CE-6DB70DBA9567}" type="datetimeFigureOut">
               <a:rPr lang="en-US" smtClean="0"/>
               <a:pPr/>
-              <a:t>2/3/26</a:t>
+              <a:t>2/24/26</a:t>
             </a:fld>
             <a:endParaRPr lang="en-US" dirty="0"/>
           </a:p>
@@ -3015,7 +3016,7 @@
             <a:fld id="{B61BEF0D-F0BB-DE4B-95CE-6DB70DBA9567}" type="datetimeFigureOut">
               <a:rPr lang="en-US" smtClean="0"/>
               <a:pPr/>
-              <a:t>2/3/26</a:t>
+              <a:t>2/24/26</a:t>
             </a:fld>
             <a:endParaRPr lang="en-US" dirty="0"/>
           </a:p>
@@ -3179,7 +3180,7 @@
             <a:fld id="{B61BEF0D-F0BB-DE4B-95CE-6DB70DBA9567}" type="datetimeFigureOut">
               <a:rPr lang="en-US" smtClean="0"/>
               <a:pPr/>
-              <a:t>2/3/26</a:t>
+              <a:t>2/24/26</a:t>
             </a:fld>
             <a:endParaRPr lang="en-US" dirty="0"/>
           </a:p>
@@ -3559,7 +3560,7 @@
             <a:fld id="{B61BEF0D-F0BB-DE4B-95CE-6DB70DBA9567}" type="datetimeFigureOut">
               <a:rPr lang="en-US" smtClean="0"/>
               <a:pPr/>
-              <a:t>2/3/26</a:t>
+              <a:t>2/24/26</a:t>
             </a:fld>
             <a:endParaRPr lang="en-US" dirty="0"/>
           </a:p>
@@ -3850,7 +3851,7 @@
             <a:fld id="{B61BEF0D-F0BB-DE4B-95CE-6DB70DBA9567}" type="datetimeFigureOut">
               <a:rPr lang="en-US" smtClean="0"/>
               <a:pPr/>
-              <a:t>2/3/26</a:t>
+              <a:t>2/24/26</a:t>
             </a:fld>
             <a:endParaRPr lang="en-US" dirty="0"/>
           </a:p>
@@ -4063,7 +4064,7 @@
             <a:fld id="{B61BEF0D-F0BB-DE4B-95CE-6DB70DBA9567}" type="datetimeFigureOut">
               <a:rPr lang="en-US" smtClean="0"/>
               <a:pPr/>
-              <a:t>2/3/26</a:t>
+              <a:t>2/24/26</a:t>
             </a:fld>
             <a:endParaRPr lang="en-US" dirty="0"/>
           </a:p>
@@ -4769,6 +4770,178 @@
   <p:cSld>
     <p:spTree>
       <p:nvGrpSpPr>
+        <p:cNvPr id="1" name="">
+          <a:extLst>
+            <a:ext uri="{FF2B5EF4-FFF2-40B4-BE49-F238E27FC236}">
+              <a16:creationId xmlns:a16="http://schemas.microsoft.com/office/drawing/2014/main" id="{2E3B5A12-568C-F176-922C-DB7ECA83E208}"/>
+            </a:ext>
+          </a:extLst>
+        </p:cNvPr>
+        <p:cNvGrpSpPr/>
+        <p:nvPr/>
+      </p:nvGrpSpPr>
+      <p:grpSpPr>
+        <a:xfrm>
+          <a:off x="0" y="0"/>
+          <a:ext cx="0" cy="0"/>
+          <a:chOff x="0" y="0"/>
+          <a:chExt cx="0" cy="0"/>
+        </a:xfrm>
+      </p:grpSpPr>
+      <p:sp>
+        <p:nvSpPr>
+          <p:cNvPr id="2" name="Title 1">
+            <a:extLst>
+              <a:ext uri="{FF2B5EF4-FFF2-40B4-BE49-F238E27FC236}">
+                <a16:creationId xmlns:a16="http://schemas.microsoft.com/office/drawing/2014/main" id="{A0573160-96E9-1E9D-DC69-08228919C175}"/>
+              </a:ext>
+            </a:extLst>
+          </p:cNvPr>
+          <p:cNvSpPr>
+            <a:spLocks noGrp="1"/>
+          </p:cNvSpPr>
+          <p:nvPr>
+            <p:ph type="title"/>
+          </p:nvPr>
+        </p:nvSpPr>
+        <p:spPr/>
+        <p:txBody>
+          <a:bodyPr/>
+          <a:lstStyle/>
+          <a:p>
+            <a:r>
+              <a:rPr lang="en-US" dirty="0"/>
+              <a:t>announcements / reminders</a:t>
+            </a:r>
+          </a:p>
+        </p:txBody>
+      </p:sp>
+      <p:sp>
+        <p:nvSpPr>
+          <p:cNvPr id="3" name="Content Placeholder 2">
+            <a:extLst>
+              <a:ext uri="{FF2B5EF4-FFF2-40B4-BE49-F238E27FC236}">
+                <a16:creationId xmlns:a16="http://schemas.microsoft.com/office/drawing/2014/main" id="{F8B7CCB9-2742-4676-D60B-819EDF14FD3B}"/>
+              </a:ext>
+            </a:extLst>
+          </p:cNvPr>
+          <p:cNvSpPr>
+            <a:spLocks noGrp="1"/>
+          </p:cNvSpPr>
+          <p:nvPr>
+            <p:ph idx="1"/>
+          </p:nvPr>
+        </p:nvSpPr>
+        <p:spPr/>
+        <p:txBody>
+          <a:bodyPr anchor="t">
+            <a:normAutofit fontScale="92500" lnSpcReduction="10000"/>
+          </a:bodyPr>
+          <a:lstStyle/>
+          <a:p>
+            <a:pPr marL="0" indent="0">
+              <a:buNone/>
+            </a:pPr>
+            <a:endParaRPr lang="en-US" sz="2200" dirty="0"/>
+          </a:p>
+          <a:p>
+            <a:r>
+              <a:rPr lang="en-US" sz="2200" dirty="0"/>
+              <a:t>Thursday </a:t>
+            </a:r>
+            <a:r>
+              <a:rPr lang="en-US" sz="2200" dirty="0">
+                <a:highlight>
+                  <a:srgbClr val="FFFF00"/>
+                </a:highlight>
+              </a:rPr>
+              <a:t>02/26 is Rally Day </a:t>
+            </a:r>
+          </a:p>
+          <a:p>
+            <a:pPr lvl="1"/>
+            <a:r>
+              <a:rPr lang="en-US" sz="2200" dirty="0"/>
+              <a:t>No class</a:t>
+            </a:r>
+          </a:p>
+          <a:p>
+            <a:pPr lvl="1"/>
+            <a:r>
+              <a:rPr lang="en-US" sz="2200" dirty="0"/>
+              <a:t>Make up office hours 10:30-12:00</a:t>
+            </a:r>
+          </a:p>
+          <a:p>
+            <a:pPr lvl="1"/>
+            <a:r>
+              <a:rPr lang="en-US" sz="2200" dirty="0"/>
+              <a:t>Mid-semester project released – start early </a:t>
+            </a:r>
+          </a:p>
+          <a:p>
+            <a:r>
+              <a:rPr lang="en-US" sz="2200" dirty="0"/>
+              <a:t>Next week (</a:t>
+            </a:r>
+            <a:r>
+              <a:rPr lang="en-US" sz="2200" dirty="0">
+                <a:highlight>
+                  <a:srgbClr val="FFFF00"/>
+                </a:highlight>
+              </a:rPr>
+              <a:t>03/03 &amp; 03/05</a:t>
+            </a:r>
+            <a:r>
+              <a:rPr lang="en-US" sz="2200" dirty="0"/>
+              <a:t>)</a:t>
+            </a:r>
+          </a:p>
+          <a:p>
+            <a:pPr lvl="1"/>
+            <a:r>
+              <a:rPr lang="en-US" sz="2200" dirty="0">
+                <a:highlight>
+                  <a:srgbClr val="FFFF00"/>
+                </a:highlight>
+              </a:rPr>
+              <a:t>Geospatial analysis with SAL</a:t>
+            </a:r>
+          </a:p>
+          <a:p>
+            <a:pPr lvl="1"/>
+            <a:r>
+              <a:rPr lang="en-US" sz="2200" dirty="0"/>
+              <a:t>03/03 in our regular classroom</a:t>
+            </a:r>
+          </a:p>
+          <a:p>
+            <a:pPr lvl="1"/>
+            <a:r>
+              <a:rPr lang="en-US" sz="2200" dirty="0"/>
+              <a:t>03/05 in the SAL (Sabin-Reed 104) </a:t>
+            </a:r>
+          </a:p>
+        </p:txBody>
+      </p:sp>
+    </p:spTree>
+    <p:extLst>
+      <p:ext uri="{BB962C8B-B14F-4D97-AF65-F5344CB8AC3E}">
+        <p14:creationId xmlns:p14="http://schemas.microsoft.com/office/powerpoint/2010/main" val="2534021860"/>
+      </p:ext>
+    </p:extLst>
+  </p:cSld>
+  <p:clrMapOvr>
+    <a:masterClrMapping/>
+  </p:clrMapOvr>
+</p:sld>
+</file>
+
+<file path=ppt/slides/slide3.xml><?xml version="1.0" encoding="utf-8"?>
+<p:sld xmlns:a="http://schemas.openxmlformats.org/drawingml/2006/main" xmlns:r="http://schemas.openxmlformats.org/officeDocument/2006/relationships" xmlns:p="http://schemas.openxmlformats.org/presentationml/2006/main">
+  <p:cSld>
+    <p:spTree>
+      <p:nvGrpSpPr>
         <p:cNvPr id="1" name=""/>
         <p:cNvGrpSpPr/>
         <p:nvPr/>
@@ -4873,7 +5046,7 @@
 </p:sld>
 </file>
 
-<file path=ppt/slides/slide3.xml><?xml version="1.0" encoding="utf-8"?>
+<file path=ppt/slides/slide4.xml><?xml version="1.0" encoding="utf-8"?>
 <p:sld xmlns:a="http://schemas.openxmlformats.org/drawingml/2006/main" xmlns:r="http://schemas.openxmlformats.org/officeDocument/2006/relationships" xmlns:p="http://schemas.openxmlformats.org/presentationml/2006/main">
   <p:cSld>
     <p:spTree>
@@ -5022,7 +5195,7 @@
 </p:sld>
 </file>
 
-<file path=ppt/slides/slide4.xml><?xml version="1.0" encoding="utf-8"?>
+<file path=ppt/slides/slide5.xml><?xml version="1.0" encoding="utf-8"?>
 <p:sld xmlns:a="http://schemas.openxmlformats.org/drawingml/2006/main" xmlns:r="http://schemas.openxmlformats.org/officeDocument/2006/relationships" xmlns:p="http://schemas.openxmlformats.org/presentationml/2006/main">
   <p:cSld>
     <p:spTree>
@@ -5256,7 +5429,7 @@
 </p:sld>
 </file>
 
-<file path=ppt/slides/slide5.xml><?xml version="1.0" encoding="utf-8"?>
+<file path=ppt/slides/slide6.xml><?xml version="1.0" encoding="utf-8"?>
 <p:sld xmlns:a="http://schemas.openxmlformats.org/drawingml/2006/main" xmlns:r="http://schemas.openxmlformats.org/officeDocument/2006/relationships" xmlns:p="http://schemas.openxmlformats.org/presentationml/2006/main">
   <p:cSld>
     <p:spTree>
@@ -5673,7 +5846,7 @@
 </p:sld>
 </file>
 
-<file path=ppt/slides/slide6.xml><?xml version="1.0" encoding="utf-8"?>
+<file path=ppt/slides/slide7.xml><?xml version="1.0" encoding="utf-8"?>
 <p:sld xmlns:a="http://schemas.openxmlformats.org/drawingml/2006/main" xmlns:r="http://schemas.openxmlformats.org/officeDocument/2006/relationships" xmlns:p="http://schemas.openxmlformats.org/presentationml/2006/main">
   <p:cSld>
     <p:spTree>
@@ -5816,7 +5989,7 @@
 </p:sld>
 </file>
 
-<file path=ppt/slides/slide7.xml><?xml version="1.0" encoding="utf-8"?>
+<file path=ppt/slides/slide8.xml><?xml version="1.0" encoding="utf-8"?>
 <p:sld xmlns:a="http://schemas.openxmlformats.org/drawingml/2006/main" xmlns:r="http://schemas.openxmlformats.org/officeDocument/2006/relationships" xmlns:p="http://schemas.openxmlformats.org/presentationml/2006/main">
   <p:cSld>
     <p:spTree>

--- a/slides/08-network-lab.pptx
+++ b/slides/08-network-lab.pptx
@@ -4718,9 +4718,10 @@
               <a:rPr lang="en-US" dirty="0"/>
             </a:br>
             <a:r>
-              <a:rPr lang="en-US" dirty="0"/>
-              <a:t>network analysis</a:t>
-            </a:r>
+              <a:rPr lang="en-US"/>
+              <a:t>network analysis Lab</a:t>
+            </a:r>
+            <a:endParaRPr lang="en-US" dirty="0"/>
           </a:p>
         </p:txBody>
       </p:sp>
